--- a/brand/beyna-agency/social/editable-pptx/Beyna-Instagram-Carousel-1080x1350-EDITABLE.pptx
+++ b/brand/beyna-agency/social/editable-pptx/Beyna-Instagram-Carousel-1080x1350-EDITABLE.pptx
@@ -4059,7 +4059,7 @@
             <a:r>
               <a:rPr b="1" sz="8400" spc="-252">
                 <a:solidFill>
-                  <a:srgbClr val="24242B"/>
+                  <a:srgbClr val="1B1046"/>
                 </a:solidFill>
                 <a:latin typeface="Syne"/>
               </a:rPr>
@@ -4241,7 +4241,7 @@
             <a:r>
               <a:rPr b="1" sz="8400" spc="-252">
                 <a:solidFill>
-                  <a:srgbClr val="24242B"/>
+                  <a:srgbClr val="1B1046"/>
                 </a:solidFill>
                 <a:latin typeface="Syne"/>
               </a:rPr>
@@ -4423,7 +4423,7 @@
             <a:r>
               <a:rPr b="1" sz="8400" spc="-252">
                 <a:solidFill>
-                  <a:srgbClr val="24242B"/>
+                  <a:srgbClr val="1B1046"/>
                 </a:solidFill>
                 <a:latin typeface="Syne"/>
               </a:rPr>
